--- a/data/09_internal_training/training_4.pptx
+++ b/data/09_internal_training/training_4.pptx
@@ -3140,61 +3140,51 @@
           <a:p/>
           <a:p>
             <a:r>
-              <a:t>风险管理部认为，机器人 行业仍然面临若干</a:t>
-            </a:r>
-          </a:p>
-          <a:p>
-            <a:r>
-              <a:t>不确定性因素，包括技术迭代风险、政策变化、</a:t>
-            </a:r>
-          </a:p>
-          <a:p>
-            <a:r>
-              <a:t>以及市场竞争加剧等问题。</a:t>
-            </a:r>
-          </a:p>
-          <a:p/>
-          <a:p/>
-          <a:p>
-            <a:r>
-              <a:t>佳禾科技有限公司 是中国 半导体 行业的重要企业之一。</a:t>
-            </a:r>
-          </a:p>
-          <a:p>
-            <a:r>
-              <a:t>根据华辰资本 风险管理部 的研究，该公司成立于 2015 年，</a:t>
-            </a:r>
-          </a:p>
-          <a:p>
-            <a:r>
-              <a:t>目前员工规模约 3623 人。公司近年来持续加大研发投入，</a:t>
-            </a:r>
-          </a:p>
-          <a:p>
-            <a:r>
-              <a:t>在核心技术方面形成了较强的竞争壁垒。</a:t>
-            </a:r>
-          </a:p>
-          <a:p/>
-          <a:p/>
-          <a:p>
-            <a:r>
-              <a:t>精芯科技有限公司 是中国 云计算 行业的重要企业之一。</a:t>
-            </a:r>
-          </a:p>
-          <a:p>
-            <a:r>
-              <a:t>根据华辰资本 量化研究部 的研究，该公司成立于 2005 年，</a:t>
-            </a:r>
-          </a:p>
-          <a:p>
-            <a:r>
-              <a:t>目前员工规模约 3520 人。公司近年来持续加大研发投入，</a:t>
-            </a:r>
-          </a:p>
-          <a:p>
-            <a:r>
-              <a:t>在核心技术方面形成了较强的竞争壁垒。</a:t>
+              <a:t>华辰资本旗下的 HC Global Macro Fund 在最近的资产配置会议中</a:t>
+            </a:r>
+          </a:p>
+          <a:p>
+            <a:r>
+              <a:t>讨论了 人工智能 行业的投资机会，并对 方正科技传媒有限公司</a:t>
+            </a:r>
+          </a:p>
+          <a:p>
+            <a:r>
+              <a:t>进行了重点评估。</a:t>
+            </a:r>
+          </a:p>
+          <a:p/>
+          <a:p/>
+          <a:p>
+            <a:r>
+              <a:t>华辰资本旗下的 HC Energy Transition Fund 在最近的资产配置会议中</a:t>
+            </a:r>
+          </a:p>
+          <a:p>
+            <a:r>
+              <a:t>讨论了 消费科技 行业的投资机会，并对 飞海科技传媒有限公司</a:t>
+            </a:r>
+          </a:p>
+          <a:p>
+            <a:r>
+              <a:t>进行了重点评估。</a:t>
+            </a:r>
+          </a:p>
+          <a:p/>
+          <a:p/>
+          <a:p>
+            <a:r>
+              <a:t>根据内部财务模型测算，华泰通安传媒有限公司 在未来三年</a:t>
+            </a:r>
+          </a:p>
+          <a:p>
+            <a:r>
+              <a:t>收入复合增长率预计可达到 31% 左右。</a:t>
+            </a:r>
+          </a:p>
+          <a:p>
+            <a:r>
+              <a:t>该预测基于行业需求增长以及公司产能扩张计划。</a:t>
             </a:r>
           </a:p>
           <a:p/>
@@ -3256,44 +3246,17 @@
           <a:p/>
           <a:p>
             <a:r>
-              <a:t>昊嘉网络有限公司 是中国 新能源 行业的重要企业之一。</a:t>
-            </a:r>
-          </a:p>
-          <a:p>
-            <a:r>
-              <a:t>根据华辰资本 投资策略部 的研究，该公司成立于 2016 年，</a:t>
-            </a:r>
-          </a:p>
-          <a:p>
-            <a:r>
-              <a:t>目前员工规模约 4510 人。公司近年来持续加大研发投入，</a:t>
-            </a:r>
-          </a:p>
-          <a:p>
-            <a:r>
-              <a:t>在核心技术方面形成了较强的竞争壁垒。</a:t>
-            </a:r>
-          </a:p>
-          <a:p/>
-          <a:p/>
-          <a:p>
-            <a:r>
-              <a:t>昊嘉网络有限公司 是中国 新能源 行业的重要企业之一。</a:t>
-            </a:r>
-          </a:p>
-          <a:p>
-            <a:r>
-              <a:t>根据华辰资本 投资策略部 的研究，该公司成立于 2016 年，</a:t>
-            </a:r>
-          </a:p>
-          <a:p>
-            <a:r>
-              <a:t>目前员工规模约 4510 人。公司近年来持续加大研发投入，</a:t>
-            </a:r>
-          </a:p>
-          <a:p>
-            <a:r>
-              <a:t>在核心技术方面形成了较强的竞争壁垒。</a:t>
+              <a:t>根据内部财务模型测算，鑫博腾飞信息有限公司 在未来三年</a:t>
+            </a:r>
+          </a:p>
+          <a:p>
+            <a:r>
+              <a:t>收入复合增长率预计可达到 16% 左右。</a:t>
+            </a:r>
+          </a:p>
+          <a:p>
+            <a:r>
+              <a:t>该预测基于行业需求增长以及公司产能扩张计划。</a:t>
             </a:r>
           </a:p>
           <a:p/>
@@ -3301,6 +3264,23 @@
           <a:p>
             <a:r>
               <a:t>风险管理部认为，人工智能 行业仍然面临若干</a:t>
+            </a:r>
+          </a:p>
+          <a:p>
+            <a:r>
+              <a:t>不确定性因素，包括技术迭代风险、政策变化、</a:t>
+            </a:r>
+          </a:p>
+          <a:p>
+            <a:r>
+              <a:t>以及市场竞争加剧等问题。</a:t>
+            </a:r>
+          </a:p>
+          <a:p/>
+          <a:p/>
+          <a:p>
+            <a:r>
+              <a:t>风险管理部认为，云计算 行业仍然面临若干</a:t>
             </a:r>
           </a:p>
           <a:p>
@@ -3372,51 +3352,56 @@
           <a:p/>
           <a:p>
             <a:r>
-              <a:t>从产业链角度看，机器人 行业主要由上游设备厂商、</a:t>
-            </a:r>
-          </a:p>
-          <a:p>
-            <a:r>
-              <a:t>中游平台企业以及下游应用厂商组成。</a:t>
-            </a:r>
-          </a:p>
-          <a:p>
-            <a:r>
-              <a:t>东方峻景网络有限公司 主要位于产业链的 下游 环节。</a:t>
-            </a:r>
-          </a:p>
-          <a:p/>
-          <a:p/>
-          <a:p>
-            <a:r>
-              <a:t>风险管理部认为，云计算 行业仍然面临若干</a:t>
-            </a:r>
-          </a:p>
-          <a:p>
-            <a:r>
-              <a:t>不确定性因素，包括技术迭代风险、政策变化、</a:t>
-            </a:r>
-          </a:p>
-          <a:p>
-            <a:r>
-              <a:t>以及市场竞争加剧等问题。</a:t>
-            </a:r>
-          </a:p>
-          <a:p/>
-          <a:p/>
-          <a:p>
-            <a:r>
-              <a:t>根据内部财务模型测算，万迅电脑网络有限公司 在未来三年</a:t>
-            </a:r>
-          </a:p>
-          <a:p>
-            <a:r>
-              <a:t>收入复合增长率预计可达到 16% 左右。</a:t>
-            </a:r>
-          </a:p>
-          <a:p>
-            <a:r>
-              <a:t>该预测基于行业需求增长以及公司产能扩张计划。</a:t>
+              <a:t>华辰资本旗下的 HC Alpha Growth Fund 在最近的资产配置会议中</a:t>
+            </a:r>
+          </a:p>
+          <a:p>
+            <a:r>
+              <a:t>讨论了 消费科技 行业的投资机会，并对 华泰通安传媒有限公司</a:t>
+            </a:r>
+          </a:p>
+          <a:p>
+            <a:r>
+              <a:t>进行了重点评估。</a:t>
+            </a:r>
+          </a:p>
+          <a:p/>
+          <a:p/>
+          <a:p>
+            <a:r>
+              <a:t>华辰资本旗下的 HC Energy Transition Fund 在最近的资产配置会议中</a:t>
+            </a:r>
+          </a:p>
+          <a:p>
+            <a:r>
+              <a:t>讨论了 人工智能 行业的投资机会，并对 华成育卓传媒有限公司</a:t>
+            </a:r>
+          </a:p>
+          <a:p>
+            <a:r>
+              <a:t>进行了重点评估。</a:t>
+            </a:r>
+          </a:p>
+          <a:p/>
+          <a:p/>
+          <a:p>
+            <a:r>
+              <a:t>新格林耐特网络有限公司 是中国 人工智能 行业的重要企业之一。</a:t>
+            </a:r>
+          </a:p>
+          <a:p>
+            <a:r>
+              <a:t>根据华辰资本 投资委员会 的研究，该公司成立于 2016 年，</a:t>
+            </a:r>
+          </a:p>
+          <a:p>
+            <a:r>
+              <a:t>目前员工规模约 5006 人。公司近年来持续加大研发投入，</a:t>
+            </a:r>
+          </a:p>
+          <a:p>
+            <a:r>
+              <a:t>在核心技术方面形成了较强的竞争壁垒。</a:t>
             </a:r>
           </a:p>
           <a:p/>
@@ -3478,56 +3463,56 @@
           <a:p/>
           <a:p>
             <a:r>
-              <a:t>华辰资本旗下的 HC Alpha Growth Fund 在最近的资产配置会议中</a:t>
-            </a:r>
-          </a:p>
-          <a:p>
-            <a:r>
-              <a:t>讨论了 新能源 行业的投资机会，并对 昊嘉网络有限公司</a:t>
+              <a:t>根据内部财务模型测算，创汇传媒有限公司 在未来三年</a:t>
+            </a:r>
+          </a:p>
+          <a:p>
+            <a:r>
+              <a:t>收入复合增长率预计可达到 25% 左右。</a:t>
+            </a:r>
+          </a:p>
+          <a:p>
+            <a:r>
+              <a:t>该预测基于行业需求增长以及公司产能扩张计划。</a:t>
+            </a:r>
+          </a:p>
+          <a:p/>
+          <a:p/>
+          <a:p>
+            <a:r>
+              <a:t>九方传媒有限公司 是中国 医疗科技 行业的重要企业之一。</a:t>
+            </a:r>
+          </a:p>
+          <a:p>
+            <a:r>
+              <a:t>根据华辰资本 量化研究部 的研究，该公司成立于 2014 年，</a:t>
+            </a:r>
+          </a:p>
+          <a:p>
+            <a:r>
+              <a:t>目前员工规模约 2973 人。公司近年来持续加大研发投入，</a:t>
+            </a:r>
+          </a:p>
+          <a:p>
+            <a:r>
+              <a:t>在核心技术方面形成了较强的竞争壁垒。</a:t>
+            </a:r>
+          </a:p>
+          <a:p/>
+          <a:p/>
+          <a:p>
+            <a:r>
+              <a:t>华辰资本旗下的 HC AI Innovation Fund 在最近的资产配置会议中</a:t>
+            </a:r>
+          </a:p>
+          <a:p>
+            <a:r>
+              <a:t>讨论了 人工智能 行业的投资机会，并对 方正科技传媒有限公司</a:t>
             </a:r>
           </a:p>
           <a:p>
             <a:r>
               <a:t>进行了重点评估。</a:t>
-            </a:r>
-          </a:p>
-          <a:p/>
-          <a:p/>
-          <a:p>
-            <a:r>
-              <a:t>从产业链角度看，半导体 行业主要由上游设备厂商、</a:t>
-            </a:r>
-          </a:p>
-          <a:p>
-            <a:r>
-              <a:t>中游平台企业以及下游应用厂商组成。</a:t>
-            </a:r>
-          </a:p>
-          <a:p>
-            <a:r>
-              <a:t>万迅电脑网络有限公司 主要位于产业链的 下游 环节。</a:t>
-            </a:r>
-          </a:p>
-          <a:p/>
-          <a:p/>
-          <a:p>
-            <a:r>
-              <a:t>创亿信息有限公司 是中国 医疗科技 行业的重要企业之一。</a:t>
-            </a:r>
-          </a:p>
-          <a:p>
-            <a:r>
-              <a:t>根据华辰资本 投资委员会 的研究，该公司成立于 2007 年，</a:t>
-            </a:r>
-          </a:p>
-          <a:p>
-            <a:r>
-              <a:t>目前员工规模约 7601 人。公司近年来持续加大研发投入，</a:t>
-            </a:r>
-          </a:p>
-          <a:p>
-            <a:r>
-              <a:t>在核心技术方面形成了较强的竞争壁垒。</a:t>
             </a:r>
           </a:p>
           <a:p/>
@@ -3589,22 +3574,17 @@
           <a:p/>
           <a:p>
             <a:r>
-              <a:t>创联世纪科技有限公司 是中国 医疗科技 行业的重要企业之一。</a:t>
-            </a:r>
-          </a:p>
-          <a:p>
-            <a:r>
-              <a:t>根据华辰资本 投资委员会 的研究，该公司成立于 2008 年，</a:t>
-            </a:r>
-          </a:p>
-          <a:p>
-            <a:r>
-              <a:t>目前员工规模约 3688 人。公司近年来持续加大研发投入，</a:t>
-            </a:r>
-          </a:p>
-          <a:p>
-            <a:r>
-              <a:t>在核心技术方面形成了较强的竞争壁垒。</a:t>
+              <a:t>从产业链角度看，消费科技 行业主要由上游设备厂商、</a:t>
+            </a:r>
+          </a:p>
+          <a:p>
+            <a:r>
+              <a:t>中游平台企业以及下游应用厂商组成。</a:t>
+            </a:r>
+          </a:p>
+          <a:p>
+            <a:r>
+              <a:t>昂歌信息信息有限公司 主要位于产业链的 下游 环节。</a:t>
             </a:r>
           </a:p>
           <a:p/>
@@ -3621,24 +3601,24 @@
           </a:p>
           <a:p>
             <a:r>
-              <a:t>飞利信科技有限公司 主要位于产业链的 上游 环节。</a:t>
-            </a:r>
-          </a:p>
-          <a:p/>
-          <a:p/>
-          <a:p>
-            <a:r>
-              <a:t>风险管理部认为，新能源 行业仍然面临若干</a:t>
-            </a:r>
-          </a:p>
-          <a:p>
-            <a:r>
-              <a:t>不确定性因素，包括技术迭代风险、政策变化、</a:t>
-            </a:r>
-          </a:p>
-          <a:p>
-            <a:r>
-              <a:t>以及市场竞争加剧等问题。</a:t>
+              <a:t>戴硕电子网络有限公司 主要位于产业链的 上游 环节。</a:t>
+            </a:r>
+          </a:p>
+          <a:p/>
+          <a:p/>
+          <a:p>
+            <a:r>
+              <a:t>根据内部财务模型测算，方正科技信息有限公司 在未来三年</a:t>
+            </a:r>
+          </a:p>
+          <a:p>
+            <a:r>
+              <a:t>收入复合增长率预计可达到 15% 左右。</a:t>
+            </a:r>
+          </a:p>
+          <a:p>
+            <a:r>
+              <a:t>该预测基于行业需求增长以及公司产能扩张计划。</a:t>
             </a:r>
           </a:p>
           <a:p/>
@@ -3700,7 +3680,7 @@
           <a:p/>
           <a:p>
             <a:r>
-              <a:t>从产业链角度看，新能源 行业主要由上游设备厂商、</a:t>
+              <a:t>从产业链角度看，半导体 行业主要由上游设备厂商、</a:t>
             </a:r>
           </a:p>
           <a:p>
@@ -3710,41 +3690,36 @@
           </a:p>
           <a:p>
             <a:r>
-              <a:t>创汇传媒有限公司 主要位于产业链的 下游 环节。</a:t>
-            </a:r>
-          </a:p>
-          <a:p/>
-          <a:p/>
-          <a:p>
-            <a:r>
-              <a:t>创亿网络有限公司 是中国 云计算 行业的重要企业之一。</a:t>
-            </a:r>
-          </a:p>
-          <a:p>
-            <a:r>
-              <a:t>根据华辰资本 风险管理部 的研究，该公司成立于 2010 年，</a:t>
-            </a:r>
-          </a:p>
-          <a:p>
-            <a:r>
-              <a:t>目前员工规模约 4041 人。公司近年来持续加大研发投入，</a:t>
-            </a:r>
-          </a:p>
-          <a:p>
-            <a:r>
-              <a:t>在核心技术方面形成了较强的竞争壁垒。</a:t>
-            </a:r>
-          </a:p>
-          <a:p/>
-          <a:p/>
-          <a:p>
-            <a:r>
-              <a:t>华辰资本旗下的 HC Energy Transition Fund 在最近的资产配置会议中</a:t>
-            </a:r>
-          </a:p>
-          <a:p>
-            <a:r>
-              <a:t>讨论了 云计算 行业的投资机会，并对 精芯科技有限公司</a:t>
+              <a:t>华泰通安网络有限公司 主要位于产业链的 上游 环节。</a:t>
+            </a:r>
+          </a:p>
+          <a:p/>
+          <a:p/>
+          <a:p>
+            <a:r>
+              <a:t>从产业链角度看，人工智能 行业主要由上游设备厂商、</a:t>
+            </a:r>
+          </a:p>
+          <a:p>
+            <a:r>
+              <a:t>中游平台企业以及下游应用厂商组成。</a:t>
+            </a:r>
+          </a:p>
+          <a:p>
+            <a:r>
+              <a:t>明腾传媒有限公司 主要位于产业链的 下游 环节。</a:t>
+            </a:r>
+          </a:p>
+          <a:p/>
+          <a:p/>
+          <a:p>
+            <a:r>
+              <a:t>华辰资本旗下的 HC Global Macro Fund 在最近的资产配置会议中</a:t>
+            </a:r>
+          </a:p>
+          <a:p>
+            <a:r>
+              <a:t>讨论了 云计算 行业的投资机会，并对 艾提科信科技有限公司</a:t>
             </a:r>
           </a:p>
           <a:p>
@@ -3811,41 +3786,24 @@
           <a:p/>
           <a:p>
             <a:r>
-              <a:t>华辰资本旗下的 HC AI Innovation Fund 在最近的资产配置会议中</a:t>
-            </a:r>
-          </a:p>
-          <a:p>
-            <a:r>
-              <a:t>讨论了 新能源 行业的投资机会，并对 九方信息有限公司</a:t>
-            </a:r>
-          </a:p>
-          <a:p>
-            <a:r>
-              <a:t>进行了重点评估。</a:t>
-            </a:r>
-          </a:p>
-          <a:p/>
-          <a:p/>
-          <a:p>
-            <a:r>
-              <a:t>风险管理部认为，机器人 行业仍然面临若干</a:t>
-            </a:r>
-          </a:p>
-          <a:p>
-            <a:r>
-              <a:t>不确定性因素，包括技术迭代风险、政策变化、</a:t>
-            </a:r>
-          </a:p>
-          <a:p>
-            <a:r>
-              <a:t>以及市场竞争加剧等问题。</a:t>
-            </a:r>
-          </a:p>
-          <a:p/>
-          <a:p/>
-          <a:p>
-            <a:r>
-              <a:t>从产业链角度看，医疗科技 行业主要由上游设备厂商、</a:t>
+              <a:t>根据内部财务模型测算，创汇传媒有限公司 在未来三年</a:t>
+            </a:r>
+          </a:p>
+          <a:p>
+            <a:r>
+              <a:t>收入复合增长率预计可达到 21% 左右。</a:t>
+            </a:r>
+          </a:p>
+          <a:p>
+            <a:r>
+              <a:t>该预测基于行业需求增长以及公司产能扩张计划。</a:t>
+            </a:r>
+          </a:p>
+          <a:p/>
+          <a:p/>
+          <a:p>
+            <a:r>
+              <a:t>从产业链角度看，新能源 行业主要由上游设备厂商、</a:t>
             </a:r>
           </a:p>
           <a:p>
@@ -3855,7 +3813,24 @@
           </a:p>
           <a:p>
             <a:r>
-              <a:t>凌云网络有限公司 主要位于产业链的 下游 环节。</a:t>
+              <a:t>恩悌网络有限公司 主要位于产业链的 中游 环节。</a:t>
+            </a:r>
+          </a:p>
+          <a:p/>
+          <a:p/>
+          <a:p>
+            <a:r>
+              <a:t>根据内部财务模型测算，明腾传媒有限公司 在未来三年</a:t>
+            </a:r>
+          </a:p>
+          <a:p>
+            <a:r>
+              <a:t>收入复合增长率预计可达到 34% 左右。</a:t>
+            </a:r>
+          </a:p>
+          <a:p>
+            <a:r>
+              <a:t>该预测基于行业需求增长以及公司产能扩张计划。</a:t>
             </a:r>
           </a:p>
           <a:p/>
@@ -3917,56 +3892,51 @@
           <a:p/>
           <a:p>
             <a:r>
-              <a:t>华辰资本旗下的 HC Quant Arbitrage Fund 在最近的资产配置会议中</a:t>
-            </a:r>
-          </a:p>
-          <a:p>
-            <a:r>
-              <a:t>讨论了 云计算 行业的投资机会，并对 天益信息有限公司</a:t>
+              <a:t>从产业链角度看，新能源 行业主要由上游设备厂商、</a:t>
+            </a:r>
+          </a:p>
+          <a:p>
+            <a:r>
+              <a:t>中游平台企业以及下游应用厂商组成。</a:t>
+            </a:r>
+          </a:p>
+          <a:p>
+            <a:r>
+              <a:t>恩悌网络有限公司 主要位于产业链的 下游 环节。</a:t>
+            </a:r>
+          </a:p>
+          <a:p/>
+          <a:p/>
+          <a:p>
+            <a:r>
+              <a:t>根据内部财务模型测算，明腾传媒有限公司 在未来三年</a:t>
+            </a:r>
+          </a:p>
+          <a:p>
+            <a:r>
+              <a:t>收入复合增长率预计可达到 22% 左右。</a:t>
+            </a:r>
+          </a:p>
+          <a:p>
+            <a:r>
+              <a:t>该预测基于行业需求增长以及公司产能扩张计划。</a:t>
+            </a:r>
+          </a:p>
+          <a:p/>
+          <a:p/>
+          <a:p>
+            <a:r>
+              <a:t>华辰资本旗下的 HC Energy Transition Fund 在最近的资产配置会议中</a:t>
+            </a:r>
+          </a:p>
+          <a:p>
+            <a:r>
+              <a:t>讨论了 新能源 行业的投资机会，并对 富罳网络有限公司</a:t>
             </a:r>
           </a:p>
           <a:p>
             <a:r>
               <a:t>进行了重点评估。</a:t>
-            </a:r>
-          </a:p>
-          <a:p/>
-          <a:p/>
-          <a:p>
-            <a:r>
-              <a:t>从产业链角度看，消费科技 行业主要由上游设备厂商、</a:t>
-            </a:r>
-          </a:p>
-          <a:p>
-            <a:r>
-              <a:t>中游平台企业以及下游应用厂商组成。</a:t>
-            </a:r>
-          </a:p>
-          <a:p>
-            <a:r>
-              <a:t>南康网络有限公司 主要位于产业链的 下游 环节。</a:t>
-            </a:r>
-          </a:p>
-          <a:p/>
-          <a:p/>
-          <a:p>
-            <a:r>
-              <a:t>创亿信息有限公司 是中国 医疗科技 行业的重要企业之一。</a:t>
-            </a:r>
-          </a:p>
-          <a:p>
-            <a:r>
-              <a:t>根据华辰资本 投资策略部 的研究，该公司成立于 2007 年，</a:t>
-            </a:r>
-          </a:p>
-          <a:p>
-            <a:r>
-              <a:t>目前员工规模约 7601 人。公司近年来持续加大研发投入，</a:t>
-            </a:r>
-          </a:p>
-          <a:p>
-            <a:r>
-              <a:t>在核心技术方面形成了较强的竞争壁垒。</a:t>
             </a:r>
           </a:p>
           <a:p/>
@@ -4028,24 +3998,41 @@
           <a:p/>
           <a:p>
             <a:r>
-              <a:t>根据内部财务模型测算，南康网络有限公司 在未来三年</a:t>
-            </a:r>
-          </a:p>
-          <a:p>
-            <a:r>
-              <a:t>收入复合增长率预计可达到 10% 左右。</a:t>
-            </a:r>
-          </a:p>
-          <a:p>
-            <a:r>
-              <a:t>该预测基于行业需求增长以及公司产能扩张计划。</a:t>
-            </a:r>
-          </a:p>
-          <a:p/>
-          <a:p/>
-          <a:p>
-            <a:r>
-              <a:t>从产业链角度看，新能源 行业主要由上游设备厂商、</a:t>
+              <a:t>华辰资本旗下的 HC Global Macro Fund 在最近的资产配置会议中</a:t>
+            </a:r>
+          </a:p>
+          <a:p>
+            <a:r>
+              <a:t>讨论了 云计算 行业的投资机会，并对 佳禾传媒有限公司</a:t>
+            </a:r>
+          </a:p>
+          <a:p>
+            <a:r>
+              <a:t>进行了重点评估。</a:t>
+            </a:r>
+          </a:p>
+          <a:p/>
+          <a:p/>
+          <a:p>
+            <a:r>
+              <a:t>华辰资本旗下的 HC Alpha Growth Fund 在最近的资产配置会议中</a:t>
+            </a:r>
+          </a:p>
+          <a:p>
+            <a:r>
+              <a:t>讨论了 新能源 行业的投资机会，并对 戴硕电子网络有限公司</a:t>
+            </a:r>
+          </a:p>
+          <a:p>
+            <a:r>
+              <a:t>进行了重点评估。</a:t>
+            </a:r>
+          </a:p>
+          <a:p/>
+          <a:p/>
+          <a:p>
+            <a:r>
+              <a:t>从产业链角度看，人工智能 行业主要由上游设备厂商、</a:t>
             </a:r>
           </a:p>
           <a:p>
@@ -4055,24 +4042,7 @@
           </a:p>
           <a:p>
             <a:r>
-              <a:t>东方峻景传媒有限公司 主要位于产业链的 下游 环节。</a:t>
-            </a:r>
-          </a:p>
-          <a:p/>
-          <a:p/>
-          <a:p>
-            <a:r>
-              <a:t>华辰资本旗下的 HC Alpha Growth Fund 在最近的资产配置会议中</a:t>
-            </a:r>
-          </a:p>
-          <a:p>
-            <a:r>
-              <a:t>讨论了 消费科技 行业的投资机会，并对 昂歌信息科技有限公司</a:t>
-            </a:r>
-          </a:p>
-          <a:p>
-            <a:r>
-              <a:t>进行了重点评估。</a:t>
+              <a:t>飞利信科技有限公司 主要位于产业链的 下游 环节。</a:t>
             </a:r>
           </a:p>
           <a:p/>
@@ -4134,56 +4104,56 @@
           <a:p/>
           <a:p>
             <a:r>
-              <a:t>风险管理部认为，云计算 行业仍然面临若干</a:t>
-            </a:r>
-          </a:p>
-          <a:p>
-            <a:r>
-              <a:t>不确定性因素，包括技术迭代风险、政策变化、</a:t>
-            </a:r>
-          </a:p>
-          <a:p>
-            <a:r>
-              <a:t>以及市场竞争加剧等问题。</a:t>
-            </a:r>
-          </a:p>
-          <a:p/>
-          <a:p/>
-          <a:p>
-            <a:r>
-              <a:t>风险管理部认为，消费科技 行业仍然面临若干</a:t>
-            </a:r>
-          </a:p>
-          <a:p>
-            <a:r>
-              <a:t>不确定性因素，包括技术迭代风险、政策变化、</a:t>
-            </a:r>
-          </a:p>
-          <a:p>
-            <a:r>
-              <a:t>以及市场竞争加剧等问题。</a:t>
-            </a:r>
-          </a:p>
-          <a:p/>
-          <a:p/>
-          <a:p>
-            <a:r>
-              <a:t>富罳信息有限公司 是中国 医疗科技 行业的重要企业之一。</a:t>
-            </a:r>
-          </a:p>
-          <a:p>
-            <a:r>
-              <a:t>根据华辰资本 量化研究部 的研究，该公司成立于 2018 年，</a:t>
-            </a:r>
-          </a:p>
-          <a:p>
-            <a:r>
-              <a:t>目前员工规模约 2035 人。公司近年来持续加大研发投入，</a:t>
+              <a:t>戴硕电子网络有限公司 是中国 新能源 行业的重要企业之一。</a:t>
+            </a:r>
+          </a:p>
+          <a:p>
+            <a:r>
+              <a:t>根据华辰资本 资产配置委员会 的研究，该公司成立于 2016 年，</a:t>
+            </a:r>
+          </a:p>
+          <a:p>
+            <a:r>
+              <a:t>目前员工规模约 2243 人。公司近年来持续加大研发投入，</a:t>
             </a:r>
           </a:p>
           <a:p>
             <a:r>
               <a:t>在核心技术方面形成了较强的竞争壁垒。</a:t>
+            </a:r>
+          </a:p>
+          <a:p/>
+          <a:p/>
+          <a:p>
+            <a:r>
+              <a:t>根据内部财务模型测算，天开科技有限公司 在未来三年</a:t>
+            </a:r>
+          </a:p>
+          <a:p>
+            <a:r>
+              <a:t>收入复合增长率预计可达到 30% 左右。</a:t>
+            </a:r>
+          </a:p>
+          <a:p>
+            <a:r>
+              <a:t>该预测基于行业需求增长以及公司产能扩张计划。</a:t>
+            </a:r>
+          </a:p>
+          <a:p/>
+          <a:p/>
+          <a:p>
+            <a:r>
+              <a:t>从产业链角度看，人工智能 行业主要由上游设备厂商、</a:t>
+            </a:r>
+          </a:p>
+          <a:p>
+            <a:r>
+              <a:t>中游平台企业以及下游应用厂商组成。</a:t>
+            </a:r>
+          </a:p>
+          <a:p>
+            <a:r>
+              <a:t>惠派国际公司科技有限公司 主要位于产业链的 下游 环节。</a:t>
             </a:r>
           </a:p>
           <a:p/>
@@ -4245,7 +4215,46 @@
           <a:p/>
           <a:p>
             <a:r>
-              <a:t>风险管理部认为，半导体 行业仍然面临若干</a:t>
+              <a:t>九方传媒有限公司 是中国 医疗科技 行业的重要企业之一。</a:t>
+            </a:r>
+          </a:p>
+          <a:p>
+            <a:r>
+              <a:t>根据华辰资本 风险管理部 的研究，该公司成立于 2014 年，</a:t>
+            </a:r>
+          </a:p>
+          <a:p>
+            <a:r>
+              <a:t>目前员工规模约 2973 人。公司近年来持续加大研发投入，</a:t>
+            </a:r>
+          </a:p>
+          <a:p>
+            <a:r>
+              <a:t>在核心技术方面形成了较强的竞争壁垒。</a:t>
+            </a:r>
+          </a:p>
+          <a:p/>
+          <a:p/>
+          <a:p>
+            <a:r>
+              <a:t>从产业链角度看，云计算 行业主要由上游设备厂商、</a:t>
+            </a:r>
+          </a:p>
+          <a:p>
+            <a:r>
+              <a:t>中游平台企业以及下游应用厂商组成。</a:t>
+            </a:r>
+          </a:p>
+          <a:p>
+            <a:r>
+              <a:t>泰麒麟网络有限公司 主要位于产业链的 下游 环节。</a:t>
+            </a:r>
+          </a:p>
+          <a:p/>
+          <a:p/>
+          <a:p>
+            <a:r>
+              <a:t>风险管理部认为，人工智能 行业仍然面临若干</a:t>
             </a:r>
           </a:p>
           <a:p>
@@ -4256,40 +4265,6 @@
           <a:p>
             <a:r>
               <a:t>以及市场竞争加剧等问题。</a:t>
-            </a:r>
-          </a:p>
-          <a:p/>
-          <a:p/>
-          <a:p>
-            <a:r>
-              <a:t>根据内部财务模型测算，东方峻景传媒有限公司 在未来三年</a:t>
-            </a:r>
-          </a:p>
-          <a:p>
-            <a:r>
-              <a:t>收入复合增长率预计可达到 29% 左右。</a:t>
-            </a:r>
-          </a:p>
-          <a:p>
-            <a:r>
-              <a:t>该预测基于行业需求增长以及公司产能扩张计划。</a:t>
-            </a:r>
-          </a:p>
-          <a:p/>
-          <a:p/>
-          <a:p>
-            <a:r>
-              <a:t>根据内部财务模型测算，天益科技有限公司 在未来三年</a:t>
-            </a:r>
-          </a:p>
-          <a:p>
-            <a:r>
-              <a:t>收入复合增长率预计可达到 16% 左右。</a:t>
-            </a:r>
-          </a:p>
-          <a:p>
-            <a:r>
-              <a:t>该预测基于行业需求增长以及公司产能扩张计划。</a:t>
             </a:r>
           </a:p>
           <a:p/>
@@ -4351,51 +4326,61 @@
           <a:p/>
           <a:p>
             <a:r>
-              <a:t>华辰资本旗下的 HC Alpha Growth Fund 在最近的资产配置会议中</a:t>
-            </a:r>
-          </a:p>
-          <a:p>
-            <a:r>
-              <a:t>讨论了 消费科技 行业的投资机会，并对 精芯信息有限公司</a:t>
-            </a:r>
-          </a:p>
-          <a:p>
-            <a:r>
-              <a:t>进行了重点评估。</a:t>
-            </a:r>
-          </a:p>
-          <a:p/>
-          <a:p/>
-          <a:p>
-            <a:r>
-              <a:t>风险管理部认为，半导体 行业仍然面临若干</a:t>
-            </a:r>
-          </a:p>
-          <a:p>
-            <a:r>
-              <a:t>不确定性因素，包括技术迭代风险、政策变化、</a:t>
-            </a:r>
-          </a:p>
-          <a:p>
-            <a:r>
-              <a:t>以及市场竞争加剧等问题。</a:t>
-            </a:r>
-          </a:p>
-          <a:p/>
-          <a:p/>
-          <a:p>
-            <a:r>
-              <a:t>华辰资本旗下的 HC AI Innovation Fund 在最近的资产配置会议中</a:t>
-            </a:r>
-          </a:p>
-          <a:p>
-            <a:r>
-              <a:t>讨论了 新能源 行业的投资机会，并对 九方网络有限公司</a:t>
-            </a:r>
-          </a:p>
-          <a:p>
-            <a:r>
-              <a:t>进行了重点评估。</a:t>
+              <a:t>根据内部财务模型测算，巨奥传媒有限公司 在未来三年</a:t>
+            </a:r>
+          </a:p>
+          <a:p>
+            <a:r>
+              <a:t>收入复合增长率预计可达到 26% 左右。</a:t>
+            </a:r>
+          </a:p>
+          <a:p>
+            <a:r>
+              <a:t>该预测基于行业需求增长以及公司产能扩张计划。</a:t>
+            </a:r>
+          </a:p>
+          <a:p/>
+          <a:p/>
+          <a:p>
+            <a:r>
+              <a:t>华成育卓传媒有限公司 是中国 人工智能 行业的重要企业之一。</a:t>
+            </a:r>
+          </a:p>
+          <a:p>
+            <a:r>
+              <a:t>根据华辰资本 投资策略部 的研究，该公司成立于 2006 年，</a:t>
+            </a:r>
+          </a:p>
+          <a:p>
+            <a:r>
+              <a:t>目前员工规模约 7579 人。公司近年来持续加大研发投入，</a:t>
+            </a:r>
+          </a:p>
+          <a:p>
+            <a:r>
+              <a:t>在核心技术方面形成了较强的竞争壁垒。</a:t>
+            </a:r>
+          </a:p>
+          <a:p/>
+          <a:p/>
+          <a:p>
+            <a:r>
+              <a:t>华成育卓科技有限公司 是中国 医疗科技 行业的重要企业之一。</a:t>
+            </a:r>
+          </a:p>
+          <a:p>
+            <a:r>
+              <a:t>根据华辰资本 投资策略部 的研究，该公司成立于 2020 年，</a:t>
+            </a:r>
+          </a:p>
+          <a:p>
+            <a:r>
+              <a:t>目前员工规模约 650 人。公司近年来持续加大研发投入，</a:t>
+            </a:r>
+          </a:p>
+          <a:p>
+            <a:r>
+              <a:t>在核心技术方面形成了较强的竞争壁垒。</a:t>
             </a:r>
           </a:p>
           <a:p/>
@@ -4457,51 +4442,56 @@
           <a:p/>
           <a:p>
             <a:r>
-              <a:t>华辰资本旗下的 HC Alpha Growth Fund 在最近的资产配置会议中</a:t>
-            </a:r>
-          </a:p>
-          <a:p>
-            <a:r>
-              <a:t>讨论了 消费科技 行业的投资机会，并对 南康网络有限公司</a:t>
-            </a:r>
-          </a:p>
-          <a:p>
-            <a:r>
-              <a:t>进行了重点评估。</a:t>
-            </a:r>
-          </a:p>
-          <a:p/>
-          <a:p/>
-          <a:p>
-            <a:r>
-              <a:t>华辰资本旗下的 HC AI Innovation Fund 在最近的资产配置会议中</a:t>
-            </a:r>
-          </a:p>
-          <a:p>
-            <a:r>
-              <a:t>讨论了 医疗科技 行业的投资机会，并对 凌云网络有限公司</a:t>
-            </a:r>
-          </a:p>
-          <a:p>
-            <a:r>
-              <a:t>进行了重点评估。</a:t>
-            </a:r>
-          </a:p>
-          <a:p/>
-          <a:p/>
-          <a:p>
-            <a:r>
-              <a:t>根据内部财务模型测算，快讯网络有限公司 在未来三年</a:t>
-            </a:r>
-          </a:p>
-          <a:p>
-            <a:r>
-              <a:t>收入复合增长率预计可达到 30% 左右。</a:t>
+              <a:t>根据内部财务模型测算，联软科技有限公司 在未来三年</a:t>
+            </a:r>
+          </a:p>
+          <a:p>
+            <a:r>
+              <a:t>收入复合增长率预计可达到 29% 左右。</a:t>
             </a:r>
           </a:p>
           <a:p>
             <a:r>
               <a:t>该预测基于行业需求增长以及公司产能扩张计划。</a:t>
+            </a:r>
+          </a:p>
+          <a:p/>
+          <a:p/>
+          <a:p>
+            <a:r>
+              <a:t>泰麒麟网络有限公司 是中国 云计算 行业的重要企业之一。</a:t>
+            </a:r>
+          </a:p>
+          <a:p>
+            <a:r>
+              <a:t>根据华辰资本 量化研究部 的研究，该公司成立于 2010 年，</a:t>
+            </a:r>
+          </a:p>
+          <a:p>
+            <a:r>
+              <a:t>目前员工规模约 4251 人。公司近年来持续加大研发投入，</a:t>
+            </a:r>
+          </a:p>
+          <a:p>
+            <a:r>
+              <a:t>在核心技术方面形成了较强的竞争壁垒。</a:t>
+            </a:r>
+          </a:p>
+          <a:p/>
+          <a:p/>
+          <a:p>
+            <a:r>
+              <a:t>风险管理部认为，机器人 行业仍然面临若干</a:t>
+            </a:r>
+          </a:p>
+          <a:p>
+            <a:r>
+              <a:t>不确定性因素，包括技术迭代风险、政策变化、</a:t>
+            </a:r>
+          </a:p>
+          <a:p>
+            <a:r>
+              <a:t>以及市场竞争加剧等问题。</a:t>
             </a:r>
           </a:p>
           <a:p/>
@@ -4563,12 +4553,34 @@
           <a:p/>
           <a:p>
             <a:r>
-              <a:t>根据内部财务模型测算，九方网络有限公司 在未来三年</a:t>
-            </a:r>
-          </a:p>
-          <a:p>
-            <a:r>
-              <a:t>收入复合增长率预计可达到 29% 左右。</a:t>
+              <a:t>华成育卓传媒有限公司 是中国 人工智能 行业的重要企业之一。</a:t>
+            </a:r>
+          </a:p>
+          <a:p>
+            <a:r>
+              <a:t>根据华辰资本 投资策略部 的研究，该公司成立于 2006 年，</a:t>
+            </a:r>
+          </a:p>
+          <a:p>
+            <a:r>
+              <a:t>目前员工规模约 7579 人。公司近年来持续加大研发投入，</a:t>
+            </a:r>
+          </a:p>
+          <a:p>
+            <a:r>
+              <a:t>在核心技术方面形成了较强的竞争壁垒。</a:t>
+            </a:r>
+          </a:p>
+          <a:p/>
+          <a:p/>
+          <a:p>
+            <a:r>
+              <a:t>根据内部财务模型测算，飞利信科技有限公司 在未来三年</a:t>
+            </a:r>
+          </a:p>
+          <a:p>
+            <a:r>
+              <a:t>收入复合增长率预计可达到 22% 左右。</a:t>
             </a:r>
           </a:p>
           <a:p>
@@ -4580,34 +4592,17 @@
           <a:p/>
           <a:p>
             <a:r>
-              <a:t>根据内部财务模型测算，创亿信息有限公司 在未来三年</a:t>
-            </a:r>
-          </a:p>
-          <a:p>
-            <a:r>
-              <a:t>收入复合增长率预计可达到 30% 左右。</a:t>
-            </a:r>
-          </a:p>
-          <a:p>
-            <a:r>
-              <a:t>该预测基于行业需求增长以及公司产能扩张计划。</a:t>
-            </a:r>
-          </a:p>
-          <a:p/>
-          <a:p/>
-          <a:p>
-            <a:r>
-              <a:t>根据内部财务模型测算，华远软件信息有限公司 在未来三年</a:t>
-            </a:r>
-          </a:p>
-          <a:p>
-            <a:r>
-              <a:t>收入复合增长率预计可达到 16% 左右。</a:t>
-            </a:r>
-          </a:p>
-          <a:p>
-            <a:r>
-              <a:t>该预测基于行业需求增长以及公司产能扩张计划。</a:t>
+              <a:t>从产业链角度看，消费科技 行业主要由上游设备厂商、</a:t>
+            </a:r>
+          </a:p>
+          <a:p>
+            <a:r>
+              <a:t>中游平台企业以及下游应用厂商组成。</a:t>
+            </a:r>
+          </a:p>
+          <a:p>
+            <a:r>
+              <a:t>昂歌信息信息有限公司 主要位于产业链的 下游 环节。</a:t>
             </a:r>
           </a:p>
           <a:p/>
@@ -4669,51 +4664,51 @@
           <a:p/>
           <a:p>
             <a:r>
-              <a:t>风险管理部认为，机器人 行业仍然面临若干</a:t>
-            </a:r>
-          </a:p>
-          <a:p>
-            <a:r>
-              <a:t>不确定性因素，包括技术迭代风险、政策变化、</a:t>
-            </a:r>
-          </a:p>
-          <a:p>
-            <a:r>
-              <a:t>以及市场竞争加剧等问题。</a:t>
-            </a:r>
-          </a:p>
-          <a:p/>
-          <a:p/>
-          <a:p>
-            <a:r>
-              <a:t>华辰资本旗下的 HC AI Innovation Fund 在最近的资产配置会议中</a:t>
-            </a:r>
-          </a:p>
-          <a:p>
-            <a:r>
-              <a:t>讨论了 云计算 行业的投资机会，并对 浦华众城信息有限公司</a:t>
-            </a:r>
-          </a:p>
-          <a:p>
-            <a:r>
-              <a:t>进行了重点评估。</a:t>
-            </a:r>
-          </a:p>
-          <a:p/>
-          <a:p/>
-          <a:p>
-            <a:r>
-              <a:t>华辰资本旗下的 HC Alpha Growth Fund 在最近的资产配置会议中</a:t>
-            </a:r>
-          </a:p>
-          <a:p>
-            <a:r>
-              <a:t>讨论了 医疗科技 行业的投资机会，并对 创联世纪科技有限公司</a:t>
-            </a:r>
-          </a:p>
-          <a:p>
-            <a:r>
-              <a:t>进行了重点评估。</a:t>
+              <a:t>从产业链角度看，消费科技 行业主要由上游设备厂商、</a:t>
+            </a:r>
+          </a:p>
+          <a:p>
+            <a:r>
+              <a:t>中游平台企业以及下游应用厂商组成。</a:t>
+            </a:r>
+          </a:p>
+          <a:p>
+            <a:r>
+              <a:t>联软科技有限公司 主要位于产业链的 中游 环节。</a:t>
+            </a:r>
+          </a:p>
+          <a:p/>
+          <a:p/>
+          <a:p>
+            <a:r>
+              <a:t>从产业链角度看，医疗科技 行业主要由上游设备厂商、</a:t>
+            </a:r>
+          </a:p>
+          <a:p>
+            <a:r>
+              <a:t>中游平台企业以及下游应用厂商组成。</a:t>
+            </a:r>
+          </a:p>
+          <a:p>
+            <a:r>
+              <a:t>华成育卓科技有限公司 主要位于产业链的 上游 环节。</a:t>
+            </a:r>
+          </a:p>
+          <a:p/>
+          <a:p/>
+          <a:p>
+            <a:r>
+              <a:t>根据内部财务模型测算，创联世纪信息有限公司 在未来三年</a:t>
+            </a:r>
+          </a:p>
+          <a:p>
+            <a:r>
+              <a:t>收入复合增长率预计可达到 10% 左右。</a:t>
+            </a:r>
+          </a:p>
+          <a:p>
+            <a:r>
+              <a:t>该预测基于行业需求增长以及公司产能扩张计划。</a:t>
             </a:r>
           </a:p>
           <a:p/>
